--- a/実績資料作成/第51期見込と第52期計画について_20260914.pptx
+++ b/実績資料作成/第51期見込と第52期計画について_20260914.pptx
@@ -153,7 +153,7 @@
       <c:layout/>
       <c:barChart>
         <c:barDir val="col"/>
-        <c:grouping val="stacked"/>
+        <c:grouping val="clustered"/>
         <c:varyColors val="1"/>
         <c:ser>
           <c:idx val="0"/>
@@ -179,16 +179,6 @@
           </c:spPr>
           <c:invertIfNegative val="0"/>
           <c:dLbls>
-            <c:dLbl>
-              <c:idx val="3"/>
-              <c:delete val="1"/>
-              <c:extLst>
-                <c:ext xmlns:c15="http://schemas.microsoft.com/office/drawing/2012/chart" uri="{CE6537A1-D6FC-4f65-9D91-7224C49458BB}"/>
-                <c:ext xmlns:c16="http://schemas.microsoft.com/office/drawing/2014/chart" uri="{C3380CC4-5D6E-409C-BE32-E72D297353CC}">
-                  <c16:uniqueId val="{00000000-7ABD-495E-ABEE-D7FEC7119441}"/>
-                </c:ext>
-              </c:extLst>
-            </c:dLbl>
             <c:numFmt formatCode="\+0.0%;\-0.0%" sourceLinked="0"/>
             <c:spPr>
               <a:noFill/>
@@ -202,9 +192,9 @@
               <a:lstStyle/>
               <a:p>
                 <a:pPr>
-                  <a:defRPr sz="1100" b="1">
-                    <a:solidFill>
-                      <a:srgbClr val="FFFFFF"/>
+                  <a:defRPr sz="1000" b="1">
+                    <a:solidFill>
+                      <a:srgbClr val="404040"/>
                     </a:solidFill>
                     <a:latin typeface="游ゴシック"/>
                   </a:defRPr>
@@ -212,7 +202,7 @@
                 <a:endParaRPr lang="ja-JP"/>
               </a:p>
             </c:txPr>
-            <c:dLblPos val="ctr"/>
+            <c:dLblPos val="outEnd"/>
             <c:showLegendKey val="0"/>
             <c:showVal val="1"/>
             <c:showCatName val="0"/>
@@ -321,56 +311,6 @@
           </c:spPr>
           <c:invertIfNegative val="0"/>
           <c:dLbls>
-            <c:dLbl>
-              <c:idx val="1"/>
-              <c:delete val="1"/>
-              <c:extLst>
-                <c:ext xmlns:c15="http://schemas.microsoft.com/office/drawing/2012/chart" uri="{CE6537A1-D6FC-4f65-9D91-7224C49458BB}"/>
-                <c:ext xmlns:c16="http://schemas.microsoft.com/office/drawing/2014/chart" uri="{C3380CC4-5D6E-409C-BE32-E72D297353CC}">
-                  <c16:uniqueId val="{00000001-7ABD-495E-ABEE-D7FEC7119441}"/>
-                </c:ext>
-              </c:extLst>
-            </c:dLbl>
-            <c:dLbl>
-              <c:idx val="2"/>
-              <c:delete val="1"/>
-              <c:extLst>
-                <c:ext xmlns:c15="http://schemas.microsoft.com/office/drawing/2012/chart" uri="{CE6537A1-D6FC-4f65-9D91-7224C49458BB}"/>
-                <c:ext xmlns:c16="http://schemas.microsoft.com/office/drawing/2014/chart" uri="{C3380CC4-5D6E-409C-BE32-E72D297353CC}">
-                  <c16:uniqueId val="{00000002-7ABD-495E-ABEE-D7FEC7119441}"/>
-                </c:ext>
-              </c:extLst>
-            </c:dLbl>
-            <c:dLbl>
-              <c:idx val="4"/>
-              <c:delete val="1"/>
-              <c:extLst>
-                <c:ext xmlns:c15="http://schemas.microsoft.com/office/drawing/2012/chart" uri="{CE6537A1-D6FC-4f65-9D91-7224C49458BB}"/>
-                <c:ext xmlns:c16="http://schemas.microsoft.com/office/drawing/2014/chart" uri="{C3380CC4-5D6E-409C-BE32-E72D297353CC}">
-                  <c16:uniqueId val="{00000003-7ABD-495E-ABEE-D7FEC7119441}"/>
-                </c:ext>
-              </c:extLst>
-            </c:dLbl>
-            <c:dLbl>
-              <c:idx val="6"/>
-              <c:delete val="1"/>
-              <c:extLst>
-                <c:ext xmlns:c15="http://schemas.microsoft.com/office/drawing/2012/chart" uri="{CE6537A1-D6FC-4f65-9D91-7224C49458BB}"/>
-                <c:ext xmlns:c16="http://schemas.microsoft.com/office/drawing/2014/chart" uri="{C3380CC4-5D6E-409C-BE32-E72D297353CC}">
-                  <c16:uniqueId val="{00000004-7ABD-495E-ABEE-D7FEC7119441}"/>
-                </c:ext>
-              </c:extLst>
-            </c:dLbl>
-            <c:dLbl>
-              <c:idx val="7"/>
-              <c:delete val="1"/>
-              <c:extLst>
-                <c:ext xmlns:c15="http://schemas.microsoft.com/office/drawing/2012/chart" uri="{CE6537A1-D6FC-4f65-9D91-7224C49458BB}"/>
-                <c:ext xmlns:c16="http://schemas.microsoft.com/office/drawing/2014/chart" uri="{C3380CC4-5D6E-409C-BE32-E72D297353CC}">
-                  <c16:uniqueId val="{00000005-7ABD-495E-ABEE-D7FEC7119441}"/>
-                </c:ext>
-              </c:extLst>
-            </c:dLbl>
             <c:numFmt formatCode="\+0.0%;\-0.0%" sourceLinked="0"/>
             <c:spPr>
               <a:noFill/>
@@ -384,9 +324,9 @@
               <a:lstStyle/>
               <a:p>
                 <a:pPr>
-                  <a:defRPr sz="1100" b="1">
-                    <a:solidFill>
-                      <a:srgbClr val="FFFFFF"/>
+                  <a:defRPr sz="1000" b="1">
+                    <a:solidFill>
+                      <a:srgbClr val="404040"/>
                     </a:solidFill>
                     <a:latin typeface="游ゴシック"/>
                   </a:defRPr>
@@ -394,7 +334,7 @@
                 <a:endParaRPr lang="ja-JP"/>
               </a:p>
             </c:txPr>
-            <c:dLblPos val="ctr"/>
+            <c:dLblPos val="outEnd"/>
             <c:showLegendKey val="0"/>
             <c:showVal val="1"/>
             <c:showCatName val="0"/>
@@ -487,8 +427,8 @@
           <c:showPercent val="0"/>
           <c:showBubbleSize val="0"/>
         </c:dLbls>
-        <c:gapWidth val="55"/>
-        <c:overlap val="100"/>
+        <c:gapWidth val="70"/>
+        <c:overlap val="-10"/>
         <c:axId val="-2068027336"/>
         <c:axId val="-2113994440"/>
       </c:barChart>

--- a/実績資料作成/第51期見込と第52期計画について_20260914.pptx
+++ b/実績資料作成/第51期見込と第52期計画について_20260914.pptx
@@ -25864,7 +25864,7 @@
           <a:p>
             <a:pPr algn="l">
               <a:lnSpc>
-                <a:spcPct val="115"/>
+                <a:spcPct val="115000"/>
               </a:lnSpc>
               <a:spcAft>
                 <a:spcPts val="0"/>
@@ -25990,7 +25990,7 @@
           <a:p>
             <a:pPr algn="l">
               <a:lnSpc>
-                <a:spcPct val="120"/>
+                <a:spcPct val="120000"/>
               </a:lnSpc>
               <a:spcAft>
                 <a:spcPts val="500"/>
@@ -26018,7 +26018,7 @@
           <a:p>
             <a:pPr algn="l">
               <a:lnSpc>
-                <a:spcPct val="120"/>
+                <a:spcPct val="120000"/>
               </a:lnSpc>
               <a:spcAft>
                 <a:spcPts val="500"/>
@@ -26046,7 +26046,7 @@
           <a:p>
             <a:pPr algn="l">
               <a:lnSpc>
-                <a:spcPct val="120"/>
+                <a:spcPct val="120000"/>
               </a:lnSpc>
               <a:spcAft>
                 <a:spcPts val="500"/>
@@ -26265,7 +26265,7 @@
           <a:p>
             <a:pPr algn="l">
               <a:lnSpc>
-                <a:spcPct val="122"/>
+                <a:spcPct val="122000"/>
               </a:lnSpc>
               <a:spcAft>
                 <a:spcPts val="0"/>
@@ -26436,7 +26436,7 @@
           <a:p>
             <a:pPr algn="l">
               <a:lnSpc>
-                <a:spcPct val="122"/>
+                <a:spcPct val="122000"/>
               </a:lnSpc>
               <a:spcAft>
                 <a:spcPts val="0"/>
@@ -26607,7 +26607,7 @@
           <a:p>
             <a:pPr algn="l">
               <a:lnSpc>
-                <a:spcPct val="122"/>
+                <a:spcPct val="122000"/>
               </a:lnSpc>
               <a:spcAft>
                 <a:spcPts val="0"/>
